--- a/中越詩歌/恩主頌_Bài ca ơn Chúa.pptx
+++ b/中越詩歌/恩主頌_Bài ca ơn Chúa.pptx
@@ -159,7 +159,7 @@
           <a:lstStyle/>
           <a:p>
             <a:r>
-              <a:rPr lang="en-US" altLang="zh-TW" smtClean="0"/>
+              <a:rPr lang="en-US" altLang="zh-TW"/>
               <a:t>Click to edit Master title style</a:t>
             </a:r>
             <a:endParaRPr lang="zh-TW" altLang="en-US"/>
@@ -278,7 +278,7 @@
           </a:lstStyle>
           <a:p>
             <a:r>
-              <a:rPr lang="en-US" altLang="zh-TW" smtClean="0"/>
+              <a:rPr lang="en-US" altLang="zh-TW"/>
               <a:t>Click to edit Master subtitle style</a:t>
             </a:r>
             <a:endParaRPr lang="zh-TW" altLang="en-US"/>
@@ -302,7 +302,7 @@
           <a:p>
             <a:fld id="{4708DAAA-A60A-4649-A77A-7F12CC5C96A6}" type="datetimeFigureOut">
               <a:rPr lang="vi-VN" smtClean="0"/>
-              <a:t>28/10/2023</a:t>
+              <a:t>03/08/2024</a:t>
             </a:fld>
             <a:endParaRPr lang="vi-VN"/>
           </a:p>
@@ -396,7 +396,7 @@
           <a:lstStyle/>
           <a:p>
             <a:r>
-              <a:rPr lang="en-US" altLang="zh-TW" smtClean="0"/>
+              <a:rPr lang="en-US" altLang="zh-TW"/>
               <a:t>Click to edit Master title style</a:t>
             </a:r>
             <a:endParaRPr lang="zh-TW" altLang="en-US"/>
@@ -420,35 +420,35 @@
           <a:p>
             <a:pPr lvl="0"/>
             <a:r>
-              <a:rPr lang="en-US" altLang="zh-TW" smtClean="0"/>
+              <a:rPr lang="en-US" altLang="zh-TW"/>
               <a:t>Edit Master text styles</a:t>
             </a:r>
           </a:p>
           <a:p>
             <a:pPr lvl="1"/>
             <a:r>
-              <a:rPr lang="en-US" altLang="zh-TW" smtClean="0"/>
+              <a:rPr lang="en-US" altLang="zh-TW"/>
               <a:t>Second level</a:t>
             </a:r>
           </a:p>
           <a:p>
             <a:pPr lvl="2"/>
             <a:r>
-              <a:rPr lang="en-US" altLang="zh-TW" smtClean="0"/>
+              <a:rPr lang="en-US" altLang="zh-TW"/>
               <a:t>Third level</a:t>
             </a:r>
           </a:p>
           <a:p>
             <a:pPr lvl="3"/>
             <a:r>
-              <a:rPr lang="en-US" altLang="zh-TW" smtClean="0"/>
+              <a:rPr lang="en-US" altLang="zh-TW"/>
               <a:t>Fourth level</a:t>
             </a:r>
           </a:p>
           <a:p>
             <a:pPr lvl="4"/>
             <a:r>
-              <a:rPr lang="en-US" altLang="zh-TW" smtClean="0"/>
+              <a:rPr lang="en-US" altLang="zh-TW"/>
               <a:t>Fifth level</a:t>
             </a:r>
             <a:endParaRPr lang="zh-TW" altLang="en-US"/>
@@ -472,7 +472,7 @@
           <a:p>
             <a:fld id="{4708DAAA-A60A-4649-A77A-7F12CC5C96A6}" type="datetimeFigureOut">
               <a:rPr lang="vi-VN" smtClean="0"/>
-              <a:t>28/10/2023</a:t>
+              <a:t>03/08/2024</a:t>
             </a:fld>
             <a:endParaRPr lang="vi-VN"/>
           </a:p>
@@ -571,7 +571,7 @@
           <a:lstStyle/>
           <a:p>
             <a:r>
-              <a:rPr lang="en-US" altLang="zh-TW" smtClean="0"/>
+              <a:rPr lang="en-US" altLang="zh-TW"/>
               <a:t>Click to edit Master title style</a:t>
             </a:r>
             <a:endParaRPr lang="zh-TW" altLang="en-US"/>
@@ -600,35 +600,35 @@
           <a:p>
             <a:pPr lvl="0"/>
             <a:r>
-              <a:rPr lang="en-US" altLang="zh-TW" smtClean="0"/>
+              <a:rPr lang="en-US" altLang="zh-TW"/>
               <a:t>Edit Master text styles</a:t>
             </a:r>
           </a:p>
           <a:p>
             <a:pPr lvl="1"/>
             <a:r>
-              <a:rPr lang="en-US" altLang="zh-TW" smtClean="0"/>
+              <a:rPr lang="en-US" altLang="zh-TW"/>
               <a:t>Second level</a:t>
             </a:r>
           </a:p>
           <a:p>
             <a:pPr lvl="2"/>
             <a:r>
-              <a:rPr lang="en-US" altLang="zh-TW" smtClean="0"/>
+              <a:rPr lang="en-US" altLang="zh-TW"/>
               <a:t>Third level</a:t>
             </a:r>
           </a:p>
           <a:p>
             <a:pPr lvl="3"/>
             <a:r>
-              <a:rPr lang="en-US" altLang="zh-TW" smtClean="0"/>
+              <a:rPr lang="en-US" altLang="zh-TW"/>
               <a:t>Fourth level</a:t>
             </a:r>
           </a:p>
           <a:p>
             <a:pPr lvl="4"/>
             <a:r>
-              <a:rPr lang="en-US" altLang="zh-TW" smtClean="0"/>
+              <a:rPr lang="en-US" altLang="zh-TW"/>
               <a:t>Fifth level</a:t>
             </a:r>
             <a:endParaRPr lang="zh-TW" altLang="en-US"/>
@@ -652,7 +652,7 @@
           <a:p>
             <a:fld id="{4708DAAA-A60A-4649-A77A-7F12CC5C96A6}" type="datetimeFigureOut">
               <a:rPr lang="vi-VN" smtClean="0"/>
-              <a:t>28/10/2023</a:t>
+              <a:t>03/08/2024</a:t>
             </a:fld>
             <a:endParaRPr lang="vi-VN"/>
           </a:p>
@@ -746,7 +746,7 @@
           <a:lstStyle/>
           <a:p>
             <a:r>
-              <a:rPr lang="en-US" altLang="zh-TW" smtClean="0"/>
+              <a:rPr lang="en-US" altLang="zh-TW"/>
               <a:t>Click to edit Master title style</a:t>
             </a:r>
             <a:endParaRPr lang="zh-TW" altLang="en-US"/>
@@ -770,35 +770,35 @@
           <a:p>
             <a:pPr lvl="0"/>
             <a:r>
-              <a:rPr lang="en-US" altLang="zh-TW" smtClean="0"/>
+              <a:rPr lang="en-US" altLang="zh-TW"/>
               <a:t>Edit Master text styles</a:t>
             </a:r>
           </a:p>
           <a:p>
             <a:pPr lvl="1"/>
             <a:r>
-              <a:rPr lang="en-US" altLang="zh-TW" smtClean="0"/>
+              <a:rPr lang="en-US" altLang="zh-TW"/>
               <a:t>Second level</a:t>
             </a:r>
           </a:p>
           <a:p>
             <a:pPr lvl="2"/>
             <a:r>
-              <a:rPr lang="en-US" altLang="zh-TW" smtClean="0"/>
+              <a:rPr lang="en-US" altLang="zh-TW"/>
               <a:t>Third level</a:t>
             </a:r>
           </a:p>
           <a:p>
             <a:pPr lvl="3"/>
             <a:r>
-              <a:rPr lang="en-US" altLang="zh-TW" smtClean="0"/>
+              <a:rPr lang="en-US" altLang="zh-TW"/>
               <a:t>Fourth level</a:t>
             </a:r>
           </a:p>
           <a:p>
             <a:pPr lvl="4"/>
             <a:r>
-              <a:rPr lang="en-US" altLang="zh-TW" smtClean="0"/>
+              <a:rPr lang="en-US" altLang="zh-TW"/>
               <a:t>Fifth level</a:t>
             </a:r>
             <a:endParaRPr lang="zh-TW" altLang="en-US"/>
@@ -822,7 +822,7 @@
           <a:p>
             <a:fld id="{4708DAAA-A60A-4649-A77A-7F12CC5C96A6}" type="datetimeFigureOut">
               <a:rPr lang="vi-VN" smtClean="0"/>
-              <a:t>28/10/2023</a:t>
+              <a:t>03/08/2024</a:t>
             </a:fld>
             <a:endParaRPr lang="vi-VN"/>
           </a:p>
@@ -925,7 +925,7 @@
           </a:lstStyle>
           <a:p>
             <a:r>
-              <a:rPr lang="en-US" altLang="zh-TW" smtClean="0"/>
+              <a:rPr lang="en-US" altLang="zh-TW"/>
               <a:t>Click to edit Master title style</a:t>
             </a:r>
             <a:endParaRPr lang="zh-TW" altLang="en-US"/>
@@ -1045,7 +1045,7 @@
           <a:p>
             <a:pPr lvl="0"/>
             <a:r>
-              <a:rPr lang="en-US" altLang="zh-TW" smtClean="0"/>
+              <a:rPr lang="en-US" altLang="zh-TW"/>
               <a:t>Edit Master text styles</a:t>
             </a:r>
           </a:p>
@@ -1068,7 +1068,7 @@
           <a:p>
             <a:fld id="{4708DAAA-A60A-4649-A77A-7F12CC5C96A6}" type="datetimeFigureOut">
               <a:rPr lang="vi-VN" smtClean="0"/>
-              <a:t>28/10/2023</a:t>
+              <a:t>03/08/2024</a:t>
             </a:fld>
             <a:endParaRPr lang="vi-VN"/>
           </a:p>
@@ -1162,7 +1162,7 @@
           <a:lstStyle/>
           <a:p>
             <a:r>
-              <a:rPr lang="en-US" altLang="zh-TW" smtClean="0"/>
+              <a:rPr lang="en-US" altLang="zh-TW"/>
               <a:t>Click to edit Master title style</a:t>
             </a:r>
             <a:endParaRPr lang="zh-TW" altLang="en-US"/>
@@ -1219,35 +1219,35 @@
           <a:p>
             <a:pPr lvl="0"/>
             <a:r>
-              <a:rPr lang="en-US" altLang="zh-TW" smtClean="0"/>
+              <a:rPr lang="en-US" altLang="zh-TW"/>
               <a:t>Edit Master text styles</a:t>
             </a:r>
           </a:p>
           <a:p>
             <a:pPr lvl="1"/>
             <a:r>
-              <a:rPr lang="en-US" altLang="zh-TW" smtClean="0"/>
+              <a:rPr lang="en-US" altLang="zh-TW"/>
               <a:t>Second level</a:t>
             </a:r>
           </a:p>
           <a:p>
             <a:pPr lvl="2"/>
             <a:r>
-              <a:rPr lang="en-US" altLang="zh-TW" smtClean="0"/>
+              <a:rPr lang="en-US" altLang="zh-TW"/>
               <a:t>Third level</a:t>
             </a:r>
           </a:p>
           <a:p>
             <a:pPr lvl="3"/>
             <a:r>
-              <a:rPr lang="en-US" altLang="zh-TW" smtClean="0"/>
+              <a:rPr lang="en-US" altLang="zh-TW"/>
               <a:t>Fourth level</a:t>
             </a:r>
           </a:p>
           <a:p>
             <a:pPr lvl="4"/>
             <a:r>
-              <a:rPr lang="en-US" altLang="zh-TW" smtClean="0"/>
+              <a:rPr lang="en-US" altLang="zh-TW"/>
               <a:t>Fifth level</a:t>
             </a:r>
             <a:endParaRPr lang="zh-TW" altLang="en-US"/>
@@ -1304,35 +1304,35 @@
           <a:p>
             <a:pPr lvl="0"/>
             <a:r>
-              <a:rPr lang="en-US" altLang="zh-TW" smtClean="0"/>
+              <a:rPr lang="en-US" altLang="zh-TW"/>
               <a:t>Edit Master text styles</a:t>
             </a:r>
           </a:p>
           <a:p>
             <a:pPr lvl="1"/>
             <a:r>
-              <a:rPr lang="en-US" altLang="zh-TW" smtClean="0"/>
+              <a:rPr lang="en-US" altLang="zh-TW"/>
               <a:t>Second level</a:t>
             </a:r>
           </a:p>
           <a:p>
             <a:pPr lvl="2"/>
             <a:r>
-              <a:rPr lang="en-US" altLang="zh-TW" smtClean="0"/>
+              <a:rPr lang="en-US" altLang="zh-TW"/>
               <a:t>Third level</a:t>
             </a:r>
           </a:p>
           <a:p>
             <a:pPr lvl="3"/>
             <a:r>
-              <a:rPr lang="en-US" altLang="zh-TW" smtClean="0"/>
+              <a:rPr lang="en-US" altLang="zh-TW"/>
               <a:t>Fourth level</a:t>
             </a:r>
           </a:p>
           <a:p>
             <a:pPr lvl="4"/>
             <a:r>
-              <a:rPr lang="en-US" altLang="zh-TW" smtClean="0"/>
+              <a:rPr lang="en-US" altLang="zh-TW"/>
               <a:t>Fifth level</a:t>
             </a:r>
             <a:endParaRPr lang="zh-TW" altLang="en-US"/>
@@ -1356,7 +1356,7 @@
           <a:p>
             <a:fld id="{4708DAAA-A60A-4649-A77A-7F12CC5C96A6}" type="datetimeFigureOut">
               <a:rPr lang="vi-VN" smtClean="0"/>
-              <a:t>28/10/2023</a:t>
+              <a:t>03/08/2024</a:t>
             </a:fld>
             <a:endParaRPr lang="vi-VN"/>
           </a:p>
@@ -1454,7 +1454,7 @@
           </a:lstStyle>
           <a:p>
             <a:r>
-              <a:rPr lang="en-US" altLang="zh-TW" smtClean="0"/>
+              <a:rPr lang="en-US" altLang="zh-TW"/>
               <a:t>Click to edit Master title style</a:t>
             </a:r>
             <a:endParaRPr lang="zh-TW" altLang="en-US"/>
@@ -1520,7 +1520,7 @@
           <a:p>
             <a:pPr lvl="0"/>
             <a:r>
-              <a:rPr lang="en-US" altLang="zh-TW" smtClean="0"/>
+              <a:rPr lang="en-US" altLang="zh-TW"/>
               <a:t>Edit Master text styles</a:t>
             </a:r>
           </a:p>
@@ -1576,35 +1576,35 @@
           <a:p>
             <a:pPr lvl="0"/>
             <a:r>
-              <a:rPr lang="en-US" altLang="zh-TW" smtClean="0"/>
+              <a:rPr lang="en-US" altLang="zh-TW"/>
               <a:t>Edit Master text styles</a:t>
             </a:r>
           </a:p>
           <a:p>
             <a:pPr lvl="1"/>
             <a:r>
-              <a:rPr lang="en-US" altLang="zh-TW" smtClean="0"/>
+              <a:rPr lang="en-US" altLang="zh-TW"/>
               <a:t>Second level</a:t>
             </a:r>
           </a:p>
           <a:p>
             <a:pPr lvl="2"/>
             <a:r>
-              <a:rPr lang="en-US" altLang="zh-TW" smtClean="0"/>
+              <a:rPr lang="en-US" altLang="zh-TW"/>
               <a:t>Third level</a:t>
             </a:r>
           </a:p>
           <a:p>
             <a:pPr lvl="3"/>
             <a:r>
-              <a:rPr lang="en-US" altLang="zh-TW" smtClean="0"/>
+              <a:rPr lang="en-US" altLang="zh-TW"/>
               <a:t>Fourth level</a:t>
             </a:r>
           </a:p>
           <a:p>
             <a:pPr lvl="4"/>
             <a:r>
-              <a:rPr lang="en-US" altLang="zh-TW" smtClean="0"/>
+              <a:rPr lang="en-US" altLang="zh-TW"/>
               <a:t>Fifth level</a:t>
             </a:r>
             <a:endParaRPr lang="zh-TW" altLang="en-US"/>
@@ -1670,7 +1670,7 @@
           <a:p>
             <a:pPr lvl="0"/>
             <a:r>
-              <a:rPr lang="en-US" altLang="zh-TW" smtClean="0"/>
+              <a:rPr lang="en-US" altLang="zh-TW"/>
               <a:t>Edit Master text styles</a:t>
             </a:r>
           </a:p>
@@ -1726,35 +1726,35 @@
           <a:p>
             <a:pPr lvl="0"/>
             <a:r>
-              <a:rPr lang="en-US" altLang="zh-TW" smtClean="0"/>
+              <a:rPr lang="en-US" altLang="zh-TW"/>
               <a:t>Edit Master text styles</a:t>
             </a:r>
           </a:p>
           <a:p>
             <a:pPr lvl="1"/>
             <a:r>
-              <a:rPr lang="en-US" altLang="zh-TW" smtClean="0"/>
+              <a:rPr lang="en-US" altLang="zh-TW"/>
               <a:t>Second level</a:t>
             </a:r>
           </a:p>
           <a:p>
             <a:pPr lvl="2"/>
             <a:r>
-              <a:rPr lang="en-US" altLang="zh-TW" smtClean="0"/>
+              <a:rPr lang="en-US" altLang="zh-TW"/>
               <a:t>Third level</a:t>
             </a:r>
           </a:p>
           <a:p>
             <a:pPr lvl="3"/>
             <a:r>
-              <a:rPr lang="en-US" altLang="zh-TW" smtClean="0"/>
+              <a:rPr lang="en-US" altLang="zh-TW"/>
               <a:t>Fourth level</a:t>
             </a:r>
           </a:p>
           <a:p>
             <a:pPr lvl="4"/>
             <a:r>
-              <a:rPr lang="en-US" altLang="zh-TW" smtClean="0"/>
+              <a:rPr lang="en-US" altLang="zh-TW"/>
               <a:t>Fifth level</a:t>
             </a:r>
             <a:endParaRPr lang="zh-TW" altLang="en-US"/>
@@ -1778,7 +1778,7 @@
           <a:p>
             <a:fld id="{4708DAAA-A60A-4649-A77A-7F12CC5C96A6}" type="datetimeFigureOut">
               <a:rPr lang="vi-VN" smtClean="0"/>
-              <a:t>28/10/2023</a:t>
+              <a:t>03/08/2024</a:t>
             </a:fld>
             <a:endParaRPr lang="vi-VN"/>
           </a:p>
@@ -1872,7 +1872,7 @@
           <a:lstStyle/>
           <a:p>
             <a:r>
-              <a:rPr lang="en-US" altLang="zh-TW" smtClean="0"/>
+              <a:rPr lang="en-US" altLang="zh-TW"/>
               <a:t>Click to edit Master title style</a:t>
             </a:r>
             <a:endParaRPr lang="zh-TW" altLang="en-US"/>
@@ -1896,7 +1896,7 @@
           <a:p>
             <a:fld id="{4708DAAA-A60A-4649-A77A-7F12CC5C96A6}" type="datetimeFigureOut">
               <a:rPr lang="vi-VN" smtClean="0"/>
-              <a:t>28/10/2023</a:t>
+              <a:t>03/08/2024</a:t>
             </a:fld>
             <a:endParaRPr lang="vi-VN"/>
           </a:p>
@@ -1991,7 +1991,7 @@
           <a:p>
             <a:fld id="{4708DAAA-A60A-4649-A77A-7F12CC5C96A6}" type="datetimeFigureOut">
               <a:rPr lang="vi-VN" smtClean="0"/>
-              <a:t>28/10/2023</a:t>
+              <a:t>03/08/2024</a:t>
             </a:fld>
             <a:endParaRPr lang="vi-VN"/>
           </a:p>
@@ -2094,7 +2094,7 @@
           </a:lstStyle>
           <a:p>
             <a:r>
-              <a:rPr lang="en-US" altLang="zh-TW" smtClean="0"/>
+              <a:rPr lang="en-US" altLang="zh-TW"/>
               <a:t>Click to edit Master title style</a:t>
             </a:r>
             <a:endParaRPr lang="zh-TW" altLang="en-US"/>
@@ -2151,35 +2151,35 @@
           <a:p>
             <a:pPr lvl="0"/>
             <a:r>
-              <a:rPr lang="en-US" altLang="zh-TW" smtClean="0"/>
+              <a:rPr lang="en-US" altLang="zh-TW"/>
               <a:t>Edit Master text styles</a:t>
             </a:r>
           </a:p>
           <a:p>
             <a:pPr lvl="1"/>
             <a:r>
-              <a:rPr lang="en-US" altLang="zh-TW" smtClean="0"/>
+              <a:rPr lang="en-US" altLang="zh-TW"/>
               <a:t>Second level</a:t>
             </a:r>
           </a:p>
           <a:p>
             <a:pPr lvl="2"/>
             <a:r>
-              <a:rPr lang="en-US" altLang="zh-TW" smtClean="0"/>
+              <a:rPr lang="en-US" altLang="zh-TW"/>
               <a:t>Third level</a:t>
             </a:r>
           </a:p>
           <a:p>
             <a:pPr lvl="3"/>
             <a:r>
-              <a:rPr lang="en-US" altLang="zh-TW" smtClean="0"/>
+              <a:rPr lang="en-US" altLang="zh-TW"/>
               <a:t>Fourth level</a:t>
             </a:r>
           </a:p>
           <a:p>
             <a:pPr lvl="4"/>
             <a:r>
-              <a:rPr lang="en-US" altLang="zh-TW" smtClean="0"/>
+              <a:rPr lang="en-US" altLang="zh-TW"/>
               <a:t>Fifth level</a:t>
             </a:r>
             <a:endParaRPr lang="zh-TW" altLang="en-US"/>
@@ -2245,7 +2245,7 @@
           <a:p>
             <a:pPr lvl="0"/>
             <a:r>
-              <a:rPr lang="en-US" altLang="zh-TW" smtClean="0"/>
+              <a:rPr lang="en-US" altLang="zh-TW"/>
               <a:t>Edit Master text styles</a:t>
             </a:r>
           </a:p>
@@ -2268,7 +2268,7 @@
           <a:p>
             <a:fld id="{4708DAAA-A60A-4649-A77A-7F12CC5C96A6}" type="datetimeFigureOut">
               <a:rPr lang="vi-VN" smtClean="0"/>
-              <a:t>28/10/2023</a:t>
+              <a:t>03/08/2024</a:t>
             </a:fld>
             <a:endParaRPr lang="vi-VN"/>
           </a:p>
@@ -2371,7 +2371,7 @@
           </a:lstStyle>
           <a:p>
             <a:r>
-              <a:rPr lang="en-US" altLang="zh-TW" smtClean="0"/>
+              <a:rPr lang="en-US" altLang="zh-TW"/>
               <a:t>Click to edit Master title style</a:t>
             </a:r>
             <a:endParaRPr lang="zh-TW" altLang="en-US"/>
@@ -2436,7 +2436,7 @@
           </a:lstStyle>
           <a:p>
             <a:r>
-              <a:rPr lang="en-US" altLang="zh-TW" smtClean="0"/>
+              <a:rPr lang="en-US" altLang="zh-TW"/>
               <a:t>Click icon to add picture</a:t>
             </a:r>
             <a:endParaRPr lang="zh-TW" altLang="en-US"/>
@@ -2502,7 +2502,7 @@
           <a:p>
             <a:pPr lvl="0"/>
             <a:r>
-              <a:rPr lang="en-US" altLang="zh-TW" smtClean="0"/>
+              <a:rPr lang="en-US" altLang="zh-TW"/>
               <a:t>Edit Master text styles</a:t>
             </a:r>
           </a:p>
@@ -2525,7 +2525,7 @@
           <a:p>
             <a:fld id="{4708DAAA-A60A-4649-A77A-7F12CC5C96A6}" type="datetimeFigureOut">
               <a:rPr lang="vi-VN" smtClean="0"/>
-              <a:t>28/10/2023</a:t>
+              <a:t>03/08/2024</a:t>
             </a:fld>
             <a:endParaRPr lang="vi-VN"/>
           </a:p>
@@ -2639,10 +2639,9 @@
           <a:lstStyle/>
           <a:p>
             <a:r>
-              <a:rPr lang="zh-TW" altLang="en-US" smtClean="0"/>
+              <a:rPr lang="zh-TW" altLang="en-US"/>
               <a:t>按一下以編輯母片標題樣式</a:t>
             </a:r>
-            <a:endParaRPr lang="zh-TW" altLang="en-US"/>
           </a:p>
         </p:txBody>
       </p:sp>
@@ -2673,38 +2672,37 @@
           <a:p>
             <a:pPr lvl="0"/>
             <a:r>
-              <a:rPr lang="zh-TW" altLang="en-US" smtClean="0"/>
+              <a:rPr lang="zh-TW" altLang="en-US"/>
               <a:t>按一下以編輯母片文字樣式</a:t>
             </a:r>
           </a:p>
           <a:p>
             <a:pPr lvl="1"/>
             <a:r>
-              <a:rPr lang="zh-TW" altLang="en-US" smtClean="0"/>
+              <a:rPr lang="zh-TW" altLang="en-US"/>
               <a:t>第二層</a:t>
             </a:r>
           </a:p>
           <a:p>
             <a:pPr lvl="2"/>
             <a:r>
-              <a:rPr lang="zh-TW" altLang="en-US" smtClean="0"/>
+              <a:rPr lang="zh-TW" altLang="en-US"/>
               <a:t>第三層</a:t>
             </a:r>
           </a:p>
           <a:p>
             <a:pPr lvl="3"/>
             <a:r>
-              <a:rPr lang="zh-TW" altLang="en-US" smtClean="0"/>
+              <a:rPr lang="zh-TW" altLang="en-US"/>
               <a:t>第四層</a:t>
             </a:r>
           </a:p>
           <a:p>
             <a:pPr lvl="4"/>
             <a:r>
-              <a:rPr lang="zh-TW" altLang="en-US" smtClean="0"/>
+              <a:rPr lang="zh-TW" altLang="en-US"/>
               <a:t>第五層</a:t>
             </a:r>
-            <a:endParaRPr lang="zh-TW" altLang="en-US"/>
           </a:p>
         </p:txBody>
       </p:sp>
@@ -2743,7 +2741,7 @@
           <a:p>
             <a:fld id="{4708DAAA-A60A-4649-A77A-7F12CC5C96A6}" type="datetimeFigureOut">
               <a:rPr lang="vi-VN" smtClean="0"/>
-              <a:t>28/10/2023</a:t>
+              <a:t>03/08/2024</a:t>
             </a:fld>
             <a:endParaRPr lang="vi-VN"/>
           </a:p>
@@ -3157,7 +3155,7 @@
           </a:lstStyle>
           <a:p>
             <a:r>
-              <a:rPr lang="zh-CN" altLang="en-US" sz="7200" b="1" i="1" dirty="0" smtClean="0">
+              <a:rPr lang="zh-CN" altLang="en-US" sz="7200" b="1" i="1" dirty="0">
                 <a:solidFill>
                   <a:srgbClr val="000066"/>
                 </a:solidFill>
@@ -3171,24 +3169,7 @@
                 <a:latin typeface="微軟正黑體" pitchFamily="34" charset="-120"/>
                 <a:ea typeface="微軟正黑體" pitchFamily="34" charset="-120"/>
               </a:rPr>
-              <a:t>恩</a:t>
-            </a:r>
-            <a:r>
-              <a:rPr lang="zh-CN" altLang="en-US" sz="7200" b="1" i="1" dirty="0">
-                <a:solidFill>
-                  <a:srgbClr val="000066"/>
-                </a:solidFill>
-                <a:effectLst>
-                  <a:outerShdw blurRad="38100" dist="38100" dir="2700000" algn="tl">
-                    <a:srgbClr val="000000">
-                      <a:alpha val="43137"/>
-                    </a:srgbClr>
-                  </a:outerShdw>
-                </a:effectLst>
-                <a:latin typeface="微軟正黑體" pitchFamily="34" charset="-120"/>
-                <a:ea typeface="微軟正黑體" pitchFamily="34" charset="-120"/>
-              </a:rPr>
-              <a:t>主頌</a:t>
+              <a:t>恩主頌</a:t>
             </a:r>
           </a:p>
         </p:txBody>
@@ -3232,7 +3213,7 @@
           </a:lstStyle>
           <a:p>
             <a:r>
-              <a:rPr lang="vi-VN" sz="5400" b="1" i="1" dirty="0" smtClean="0">
+              <a:rPr lang="vi-VN" sz="5400" b="1" i="1" dirty="0">
                 <a:solidFill>
                   <a:srgbClr val="660033"/>
                 </a:solidFill>
@@ -3247,25 +3228,7 @@
                 <a:ea typeface="微軟正黑體" pitchFamily="34" charset="-120"/>
                 <a:cs typeface="Calibri" panose="020F0502020204030204" pitchFamily="34" charset="0"/>
               </a:rPr>
-              <a:t>Bài </a:t>
-            </a:r>
-            <a:r>
-              <a:rPr lang="vi-VN" sz="5400" b="1" i="1" dirty="0">
-                <a:solidFill>
-                  <a:srgbClr val="660033"/>
-                </a:solidFill>
-                <a:effectLst>
-                  <a:outerShdw blurRad="38100" dist="38100" dir="2700000" algn="tl">
-                    <a:srgbClr val="000000">
-                      <a:alpha val="43137"/>
-                    </a:srgbClr>
-                  </a:outerShdw>
-                </a:effectLst>
-                <a:latin typeface="Calibri" panose="020F0502020204030204" pitchFamily="34" charset="0"/>
-                <a:ea typeface="微軟正黑體" pitchFamily="34" charset="-120"/>
-                <a:cs typeface="Calibri" panose="020F0502020204030204" pitchFamily="34" charset="0"/>
-              </a:rPr>
-              <a:t>ca ơn Chúa</a:t>
+              <a:t>Bài ca ơn Chúa</a:t>
             </a:r>
             <a:endParaRPr lang="zh-TW" altLang="en-US" sz="5400" b="1" i="1" dirty="0">
               <a:solidFill>
@@ -3546,7 +3509,7 @@
         <p:spPr>
           <a:xfrm>
             <a:off x="0" y="5253203"/>
-            <a:ext cx="12192000" cy="748988"/>
+            <a:ext cx="12192000" cy="584775"/>
           </a:xfrm>
           <a:prstGeom prst="rect">
             <a:avLst/>
@@ -3561,54 +3524,39 @@
           <a:p>
             <a:pPr algn="ctr"/>
             <a:r>
-              <a:rPr lang="en-US" sz="4267" b="1" dirty="0" smtClean="0">
+              <a:rPr lang="en-US" sz="3200" b="1" dirty="0">
                 <a:solidFill>
                   <a:srgbClr val="000066"/>
                 </a:solidFill>
-                <a:effectLst/>
                 <a:latin typeface="Microsoft JhengHei" panose="020B0604030504040204" pitchFamily="34" charset="-120"/>
                 <a:ea typeface="Microsoft JhengHei" panose="020B0604030504040204" pitchFamily="34" charset="-120"/>
               </a:rPr>
               <a:t>( </a:t>
             </a:r>
             <a:r>
-              <a:rPr lang="zh-CN" altLang="en-US" sz="4267" b="1" dirty="0" smtClean="0">
+              <a:rPr lang="zh-CN" altLang="en-US" sz="3200" b="1" dirty="0">
                 <a:solidFill>
                   <a:srgbClr val="000066"/>
                 </a:solidFill>
-                <a:effectLst/>
                 <a:latin typeface="Microsoft JhengHei" panose="020B0604030504040204" pitchFamily="34" charset="-120"/>
                 <a:ea typeface="Microsoft JhengHei" panose="020B0604030504040204" pitchFamily="34" charset="-120"/>
               </a:rPr>
-              <a:t>副</a:t>
-            </a:r>
-            <a:r>
-              <a:rPr lang="en-US" sz="4267" b="1" dirty="0" smtClean="0">
+              <a:t>副歌</a:t>
+            </a:r>
+            <a:r>
+              <a:rPr lang="en-US" sz="3200" b="1" dirty="0">
                 <a:solidFill>
                   <a:srgbClr val="000066"/>
                 </a:solidFill>
-                <a:effectLst/>
                 <a:latin typeface="Microsoft JhengHei" panose="020B0604030504040204" pitchFamily="34" charset="-120"/>
                 <a:ea typeface="Microsoft JhengHei" panose="020B0604030504040204" pitchFamily="34" charset="-120"/>
               </a:rPr>
-              <a:t> </a:t>
-            </a:r>
-            <a:r>
-              <a:rPr lang="en-US" sz="4267" b="1" dirty="0">
-                <a:solidFill>
-                  <a:srgbClr val="000066"/>
-                </a:solidFill>
-                <a:effectLst/>
-                <a:latin typeface="Microsoft JhengHei" panose="020B0604030504040204" pitchFamily="34" charset="-120"/>
-                <a:ea typeface="Microsoft JhengHei" panose="020B0604030504040204" pitchFamily="34" charset="-120"/>
-              </a:rPr>
-              <a:t>)</a:t>
-            </a:r>
-            <a:endParaRPr lang="vi-VN" sz="4267" b="1" dirty="0">
+              <a:t> )</a:t>
+            </a:r>
+            <a:endParaRPr lang="vi-VN" sz="3200" b="1" dirty="0">
               <a:solidFill>
                 <a:srgbClr val="000066"/>
               </a:solidFill>
-              <a:effectLst/>
               <a:ea typeface="Microsoft JhengHei" panose="020B0604030504040204" pitchFamily="34" charset="-120"/>
             </a:endParaRPr>
           </a:p>
@@ -3670,24 +3618,14 @@
               <a:buNone/>
             </a:pPr>
             <a:r>
-              <a:rPr lang="zh-TW" altLang="en-US" sz="6400" b="1" dirty="0" smtClean="0">
+              <a:rPr lang="zh-TW" altLang="en-US" sz="6400" b="1" dirty="0">
                 <a:solidFill>
                   <a:srgbClr val="000066"/>
                 </a:solidFill>
                 <a:latin typeface="微軟正黑體" pitchFamily="34" charset="-120"/>
                 <a:ea typeface="微軟正黑體" pitchFamily="34" charset="-120"/>
               </a:rPr>
-              <a:t>耶</a:t>
-            </a:r>
-            <a:r>
-              <a:rPr lang="zh-TW" altLang="en-US" sz="6400" b="1" dirty="0">
-                <a:solidFill>
-                  <a:srgbClr val="000066"/>
-                </a:solidFill>
-                <a:latin typeface="微軟正黑體" pitchFamily="34" charset="-120"/>
-                <a:ea typeface="微軟正黑體" pitchFamily="34" charset="-120"/>
-              </a:rPr>
-              <a:t>穌的愛是世間最好</a:t>
+              <a:t>耶穌的愛是世間最好</a:t>
             </a:r>
           </a:p>
         </p:txBody>
@@ -4039,7 +3977,7 @@
         <p:spPr>
           <a:xfrm>
             <a:off x="0" y="5253203"/>
-            <a:ext cx="12192000" cy="748988"/>
+            <a:ext cx="12192000" cy="584775"/>
           </a:xfrm>
           <a:prstGeom prst="rect">
             <a:avLst/>
@@ -4054,7 +3992,7 @@
           <a:p>
             <a:pPr algn="ctr"/>
             <a:r>
-              <a:rPr lang="en-US" sz="4267" b="1" dirty="0">
+              <a:rPr lang="en-US" sz="3200" b="1" dirty="0">
                 <a:solidFill>
                   <a:srgbClr val="000066"/>
                 </a:solidFill>
@@ -4065,7 +4003,7 @@
               <a:t>( </a:t>
             </a:r>
             <a:r>
-              <a:rPr lang="zh-CN" altLang="en-US" sz="4267" b="1" dirty="0" smtClean="0">
+              <a:rPr lang="zh-CN" altLang="en-US" sz="3200" b="1" dirty="0">
                 <a:solidFill>
                   <a:srgbClr val="000066"/>
                 </a:solidFill>
@@ -4073,10 +4011,10 @@
                 <a:latin typeface="Microsoft JhengHei" panose="020B0604030504040204" pitchFamily="34" charset="-120"/>
                 <a:ea typeface="Microsoft JhengHei" panose="020B0604030504040204" pitchFamily="34" charset="-120"/>
               </a:rPr>
-              <a:t>正</a:t>
-            </a:r>
-            <a:r>
-              <a:rPr lang="en-US" sz="4267" b="1" dirty="0" smtClean="0">
+              <a:t>正歌</a:t>
+            </a:r>
+            <a:r>
+              <a:rPr lang="en-US" sz="3200" b="1" dirty="0">
                 <a:solidFill>
                   <a:srgbClr val="000066"/>
                 </a:solidFill>
@@ -4084,20 +4022,9 @@
                 <a:latin typeface="Microsoft JhengHei" panose="020B0604030504040204" pitchFamily="34" charset="-120"/>
                 <a:ea typeface="Microsoft JhengHei" panose="020B0604030504040204" pitchFamily="34" charset="-120"/>
               </a:rPr>
-              <a:t> </a:t>
-            </a:r>
-            <a:r>
-              <a:rPr lang="en-US" sz="4267" b="1" dirty="0">
-                <a:solidFill>
-                  <a:srgbClr val="000066"/>
-                </a:solidFill>
-                <a:effectLst/>
-                <a:latin typeface="Microsoft JhengHei" panose="020B0604030504040204" pitchFamily="34" charset="-120"/>
-                <a:ea typeface="Microsoft JhengHei" panose="020B0604030504040204" pitchFamily="34" charset="-120"/>
-              </a:rPr>
-              <a:t>)</a:t>
-            </a:r>
-            <a:endParaRPr lang="vi-VN" sz="4267" b="1" dirty="0">
+              <a:t> )</a:t>
+            </a:r>
+            <a:endParaRPr lang="vi-VN" sz="3200" b="1" dirty="0">
               <a:solidFill>
                 <a:srgbClr val="000066"/>
               </a:solidFill>
@@ -4338,7 +4265,7 @@
               <a:buNone/>
             </a:pPr>
             <a:r>
-              <a:rPr lang="en-US" sz="4000" b="1" dirty="0" err="1" smtClean="0">
+              <a:rPr lang="en-US" sz="4000" b="1" dirty="0" err="1">
                 <a:solidFill>
                   <a:srgbClr val="660033"/>
                 </a:solidFill>
@@ -4349,7 +4276,7 @@
               <a:t>Dạy</a:t>
             </a:r>
             <a:r>
-              <a:rPr lang="en-US" sz="4000" b="1" dirty="0" smtClean="0">
+              <a:rPr lang="en-US" sz="4000" b="1" dirty="0">
                 <a:solidFill>
                   <a:srgbClr val="660033"/>
                 </a:solidFill>
@@ -4434,7 +4361,7 @@
         <p:spPr>
           <a:xfrm>
             <a:off x="0" y="5253203"/>
-            <a:ext cx="12192000" cy="748988"/>
+            <a:ext cx="12192000" cy="584775"/>
           </a:xfrm>
           <a:prstGeom prst="rect">
             <a:avLst/>
@@ -4449,54 +4376,39 @@
           <a:p>
             <a:pPr algn="ctr"/>
             <a:r>
-              <a:rPr lang="en-US" sz="4267" b="1" dirty="0">
+              <a:rPr lang="en-US" sz="3200" b="1" dirty="0">
                 <a:solidFill>
                   <a:srgbClr val="000066"/>
                 </a:solidFill>
-                <a:effectLst/>
                 <a:latin typeface="Microsoft JhengHei" panose="020B0604030504040204" pitchFamily="34" charset="-120"/>
                 <a:ea typeface="Microsoft JhengHei" panose="020B0604030504040204" pitchFamily="34" charset="-120"/>
               </a:rPr>
               <a:t>( </a:t>
             </a:r>
             <a:r>
-              <a:rPr lang="zh-CN" altLang="en-US" sz="4267" b="1" dirty="0" smtClean="0">
+              <a:rPr lang="zh-CN" altLang="en-US" sz="3200" b="1" dirty="0">
                 <a:solidFill>
                   <a:srgbClr val="000066"/>
                 </a:solidFill>
-                <a:effectLst/>
                 <a:latin typeface="Microsoft JhengHei" panose="020B0604030504040204" pitchFamily="34" charset="-120"/>
                 <a:ea typeface="Microsoft JhengHei" panose="020B0604030504040204" pitchFamily="34" charset="-120"/>
               </a:rPr>
-              <a:t>正</a:t>
-            </a:r>
-            <a:r>
-              <a:rPr lang="en-US" sz="4267" b="1" dirty="0" smtClean="0">
+              <a:t>正歌</a:t>
+            </a:r>
+            <a:r>
+              <a:rPr lang="en-US" sz="3200" b="1" dirty="0">
                 <a:solidFill>
                   <a:srgbClr val="000066"/>
                 </a:solidFill>
-                <a:effectLst/>
                 <a:latin typeface="Microsoft JhengHei" panose="020B0604030504040204" pitchFamily="34" charset="-120"/>
                 <a:ea typeface="Microsoft JhengHei" panose="020B0604030504040204" pitchFamily="34" charset="-120"/>
               </a:rPr>
-              <a:t> </a:t>
-            </a:r>
-            <a:r>
-              <a:rPr lang="en-US" sz="4267" b="1" dirty="0">
-                <a:solidFill>
-                  <a:srgbClr val="000066"/>
-                </a:solidFill>
-                <a:effectLst/>
-                <a:latin typeface="Microsoft JhengHei" panose="020B0604030504040204" pitchFamily="34" charset="-120"/>
-                <a:ea typeface="Microsoft JhengHei" panose="020B0604030504040204" pitchFamily="34" charset="-120"/>
-              </a:rPr>
-              <a:t>)</a:t>
-            </a:r>
-            <a:endParaRPr lang="vi-VN" sz="4267" b="1" dirty="0">
+              <a:t> )</a:t>
+            </a:r>
+            <a:endParaRPr lang="vi-VN" sz="3200" b="1" dirty="0">
               <a:solidFill>
                 <a:srgbClr val="000066"/>
               </a:solidFill>
-              <a:effectLst/>
               <a:ea typeface="Microsoft JhengHei" panose="020B0604030504040204" pitchFamily="34" charset="-120"/>
             </a:endParaRPr>
           </a:p>
@@ -4917,7 +4829,7 @@
         <p:spPr>
           <a:xfrm>
             <a:off x="0" y="5253203"/>
-            <a:ext cx="12192000" cy="748988"/>
+            <a:ext cx="12192000" cy="584775"/>
           </a:xfrm>
           <a:prstGeom prst="rect">
             <a:avLst/>
@@ -4932,54 +4844,39 @@
           <a:p>
             <a:pPr algn="ctr"/>
             <a:r>
-              <a:rPr lang="en-US" sz="4267" b="1" dirty="0">
+              <a:rPr lang="en-US" sz="3200" b="1" dirty="0">
                 <a:solidFill>
                   <a:srgbClr val="000066"/>
                 </a:solidFill>
-                <a:effectLst/>
                 <a:latin typeface="Microsoft JhengHei" panose="020B0604030504040204" pitchFamily="34" charset="-120"/>
                 <a:ea typeface="Microsoft JhengHei" panose="020B0604030504040204" pitchFamily="34" charset="-120"/>
               </a:rPr>
               <a:t>( </a:t>
             </a:r>
             <a:r>
-              <a:rPr lang="zh-CN" altLang="en-US" sz="4267" b="1" dirty="0" smtClean="0">
+              <a:rPr lang="zh-CN" altLang="en-US" sz="3200" b="1" dirty="0">
                 <a:solidFill>
                   <a:srgbClr val="000066"/>
                 </a:solidFill>
-                <a:effectLst/>
                 <a:latin typeface="Microsoft JhengHei" panose="020B0604030504040204" pitchFamily="34" charset="-120"/>
                 <a:ea typeface="Microsoft JhengHei" panose="020B0604030504040204" pitchFamily="34" charset="-120"/>
               </a:rPr>
-              <a:t>正</a:t>
-            </a:r>
-            <a:r>
-              <a:rPr lang="en-US" sz="4267" b="1" dirty="0" smtClean="0">
+              <a:t>正歌</a:t>
+            </a:r>
+            <a:r>
+              <a:rPr lang="en-US" sz="3200" b="1" dirty="0">
                 <a:solidFill>
                   <a:srgbClr val="000066"/>
                 </a:solidFill>
-                <a:effectLst/>
                 <a:latin typeface="Microsoft JhengHei" panose="020B0604030504040204" pitchFamily="34" charset="-120"/>
                 <a:ea typeface="Microsoft JhengHei" panose="020B0604030504040204" pitchFamily="34" charset="-120"/>
               </a:rPr>
-              <a:t> </a:t>
-            </a:r>
-            <a:r>
-              <a:rPr lang="en-US" sz="4267" b="1" dirty="0">
-                <a:solidFill>
-                  <a:srgbClr val="000066"/>
-                </a:solidFill>
-                <a:effectLst/>
-                <a:latin typeface="Microsoft JhengHei" panose="020B0604030504040204" pitchFamily="34" charset="-120"/>
-                <a:ea typeface="Microsoft JhengHei" panose="020B0604030504040204" pitchFamily="34" charset="-120"/>
-              </a:rPr>
-              <a:t>)</a:t>
-            </a:r>
-            <a:endParaRPr lang="vi-VN" sz="4267" b="1" dirty="0">
+              <a:t> )</a:t>
+            </a:r>
+            <a:endParaRPr lang="vi-VN" sz="3200" b="1" dirty="0">
               <a:solidFill>
                 <a:srgbClr val="000066"/>
               </a:solidFill>
-              <a:effectLst/>
               <a:ea typeface="Microsoft JhengHei" panose="020B0604030504040204" pitchFamily="34" charset="-120"/>
             </a:endParaRPr>
           </a:p>
@@ -5356,7 +5253,7 @@
         <p:spPr>
           <a:xfrm>
             <a:off x="0" y="5253203"/>
-            <a:ext cx="12192000" cy="748988"/>
+            <a:ext cx="12192000" cy="584775"/>
           </a:xfrm>
           <a:prstGeom prst="rect">
             <a:avLst/>
@@ -5371,54 +5268,39 @@
           <a:p>
             <a:pPr algn="ctr"/>
             <a:r>
-              <a:rPr lang="en-US" sz="4267" b="1" dirty="0">
+              <a:rPr lang="en-US" sz="3200" b="1" dirty="0">
                 <a:solidFill>
                   <a:srgbClr val="000066"/>
                 </a:solidFill>
-                <a:effectLst/>
                 <a:latin typeface="Microsoft JhengHei" panose="020B0604030504040204" pitchFamily="34" charset="-120"/>
                 <a:ea typeface="Microsoft JhengHei" panose="020B0604030504040204" pitchFamily="34" charset="-120"/>
               </a:rPr>
               <a:t>( </a:t>
             </a:r>
             <a:r>
-              <a:rPr lang="zh-CN" altLang="en-US" sz="4267" b="1" dirty="0" smtClean="0">
+              <a:rPr lang="zh-CN" altLang="en-US" sz="3200" b="1" dirty="0">
                 <a:solidFill>
                   <a:srgbClr val="000066"/>
                 </a:solidFill>
-                <a:effectLst/>
                 <a:latin typeface="Microsoft JhengHei" panose="020B0604030504040204" pitchFamily="34" charset="-120"/>
                 <a:ea typeface="Microsoft JhengHei" panose="020B0604030504040204" pitchFamily="34" charset="-120"/>
               </a:rPr>
-              <a:t>正</a:t>
-            </a:r>
-            <a:r>
-              <a:rPr lang="en-US" sz="4267" b="1" dirty="0" smtClean="0">
+              <a:t>正歌</a:t>
+            </a:r>
+            <a:r>
+              <a:rPr lang="en-US" sz="3200" b="1" dirty="0">
                 <a:solidFill>
                   <a:srgbClr val="000066"/>
                 </a:solidFill>
-                <a:effectLst/>
                 <a:latin typeface="Microsoft JhengHei" panose="020B0604030504040204" pitchFamily="34" charset="-120"/>
                 <a:ea typeface="Microsoft JhengHei" panose="020B0604030504040204" pitchFamily="34" charset="-120"/>
               </a:rPr>
-              <a:t> </a:t>
-            </a:r>
-            <a:r>
-              <a:rPr lang="en-US" sz="4267" b="1" dirty="0">
-                <a:solidFill>
-                  <a:srgbClr val="000066"/>
-                </a:solidFill>
-                <a:effectLst/>
-                <a:latin typeface="Microsoft JhengHei" panose="020B0604030504040204" pitchFamily="34" charset="-120"/>
-                <a:ea typeface="Microsoft JhengHei" panose="020B0604030504040204" pitchFamily="34" charset="-120"/>
-              </a:rPr>
-              <a:t>)</a:t>
-            </a:r>
-            <a:endParaRPr lang="vi-VN" sz="4267" b="1" dirty="0">
+              <a:t> )</a:t>
+            </a:r>
+            <a:endParaRPr lang="vi-VN" sz="3200" b="1" dirty="0">
               <a:solidFill>
                 <a:srgbClr val="000066"/>
               </a:solidFill>
-              <a:effectLst/>
               <a:ea typeface="Microsoft JhengHei" panose="020B0604030504040204" pitchFamily="34" charset="-120"/>
             </a:endParaRPr>
           </a:p>
@@ -5927,7 +5809,7 @@
         <p:spPr>
           <a:xfrm>
             <a:off x="0" y="5253203"/>
-            <a:ext cx="12192000" cy="748988"/>
+            <a:ext cx="12192000" cy="584775"/>
           </a:xfrm>
           <a:prstGeom prst="rect">
             <a:avLst/>
@@ -5942,54 +5824,39 @@
           <a:p>
             <a:pPr algn="ctr"/>
             <a:r>
-              <a:rPr lang="en-US" sz="4267" b="1" dirty="0">
+              <a:rPr lang="en-US" sz="3200" b="1" dirty="0">
                 <a:solidFill>
                   <a:srgbClr val="000066"/>
                 </a:solidFill>
-                <a:effectLst/>
                 <a:latin typeface="Microsoft JhengHei" panose="020B0604030504040204" pitchFamily="34" charset="-120"/>
                 <a:ea typeface="Microsoft JhengHei" panose="020B0604030504040204" pitchFamily="34" charset="-120"/>
               </a:rPr>
               <a:t>( </a:t>
             </a:r>
             <a:r>
-              <a:rPr lang="zh-CN" altLang="en-US" sz="4267" b="1" dirty="0" smtClean="0">
+              <a:rPr lang="zh-CN" altLang="en-US" sz="3200" b="1" dirty="0">
                 <a:solidFill>
                   <a:srgbClr val="000066"/>
                 </a:solidFill>
-                <a:effectLst/>
                 <a:latin typeface="Microsoft JhengHei" panose="020B0604030504040204" pitchFamily="34" charset="-120"/>
                 <a:ea typeface="Microsoft JhengHei" panose="020B0604030504040204" pitchFamily="34" charset="-120"/>
               </a:rPr>
-              <a:t>前副</a:t>
-            </a:r>
-            <a:r>
-              <a:rPr lang="en-US" sz="4267" b="1" dirty="0" smtClean="0">
+              <a:t>前副歌</a:t>
+            </a:r>
+            <a:r>
+              <a:rPr lang="en-US" sz="3200" b="1" dirty="0">
                 <a:solidFill>
                   <a:srgbClr val="000066"/>
                 </a:solidFill>
-                <a:effectLst/>
                 <a:latin typeface="Microsoft JhengHei" panose="020B0604030504040204" pitchFamily="34" charset="-120"/>
                 <a:ea typeface="Microsoft JhengHei" panose="020B0604030504040204" pitchFamily="34" charset="-120"/>
               </a:rPr>
-              <a:t> </a:t>
-            </a:r>
-            <a:r>
-              <a:rPr lang="en-US" sz="4267" b="1" dirty="0">
-                <a:solidFill>
-                  <a:srgbClr val="000066"/>
-                </a:solidFill>
-                <a:effectLst/>
-                <a:latin typeface="Microsoft JhengHei" panose="020B0604030504040204" pitchFamily="34" charset="-120"/>
-                <a:ea typeface="Microsoft JhengHei" panose="020B0604030504040204" pitchFamily="34" charset="-120"/>
-              </a:rPr>
-              <a:t>)</a:t>
-            </a:r>
-            <a:endParaRPr lang="vi-VN" sz="4267" b="1" dirty="0">
+              <a:t> )</a:t>
+            </a:r>
+            <a:endParaRPr lang="vi-VN" sz="3200" b="1" dirty="0">
               <a:solidFill>
                 <a:srgbClr val="000066"/>
               </a:solidFill>
-              <a:effectLst/>
               <a:ea typeface="Microsoft JhengHei" panose="020B0604030504040204" pitchFamily="34" charset="-120"/>
             </a:endParaRPr>
           </a:p>
@@ -6058,47 +5925,27 @@
                 <a:latin typeface="微軟正黑體" pitchFamily="34" charset="-120"/>
                 <a:ea typeface="微軟正黑體" pitchFamily="34" charset="-120"/>
               </a:rPr>
-              <a:t>一生替人受</a:t>
-            </a:r>
-            <a:r>
-              <a:rPr lang="zh-TW" altLang="en-US" sz="6400" b="1" dirty="0" smtClean="0">
+              <a:t>一生替人受罪</a:t>
+            </a:r>
+            <a:r>
+              <a:rPr lang="vi-VN" altLang="zh-TW" sz="6400" b="1" dirty="0">
                 <a:solidFill>
                   <a:srgbClr val="000066"/>
                 </a:solidFill>
                 <a:latin typeface="微軟正黑體" pitchFamily="34" charset="-120"/>
                 <a:ea typeface="微軟正黑體" pitchFamily="34" charset="-120"/>
               </a:rPr>
-              <a:t>罪</a:t>
-            </a:r>
-            <a:r>
-              <a:rPr lang="vi-VN" altLang="zh-TW" sz="6400" b="1" dirty="0" smtClean="0">
+              <a:t>  </a:t>
+            </a:r>
+            <a:r>
+              <a:rPr lang="zh-TW" altLang="en-US" sz="6400" b="1" dirty="0">
                 <a:solidFill>
                   <a:srgbClr val="000066"/>
                 </a:solidFill>
                 <a:latin typeface="微軟正黑體" pitchFamily="34" charset="-120"/>
                 <a:ea typeface="微軟正黑體" pitchFamily="34" charset="-120"/>
               </a:rPr>
-              <a:t>  </a:t>
-            </a:r>
-            <a:r>
-              <a:rPr lang="zh-TW" altLang="en-US" sz="6400" b="1" dirty="0" smtClean="0">
-                <a:solidFill>
-                  <a:srgbClr val="000066"/>
-                </a:solidFill>
-                <a:latin typeface="微軟正黑體" pitchFamily="34" charset="-120"/>
-                <a:ea typeface="微軟正黑體" pitchFamily="34" charset="-120"/>
-              </a:rPr>
-              <a:t>關</a:t>
-            </a:r>
-            <a:r>
-              <a:rPr lang="zh-TW" altLang="en-US" sz="6400" b="1" dirty="0">
-                <a:solidFill>
-                  <a:srgbClr val="000066"/>
-                </a:solidFill>
-                <a:latin typeface="微軟正黑體" pitchFamily="34" charset="-120"/>
-                <a:ea typeface="微軟正黑體" pitchFamily="34" charset="-120"/>
-              </a:rPr>
-              <a:t>心愛護兒女</a:t>
+              <a:t>關心愛護兒女</a:t>
             </a:r>
           </a:p>
         </p:txBody>
@@ -6274,18 +6121,7 @@
                 <a:ea typeface="微軟正黑體" pitchFamily="34" charset="-120"/>
                 <a:cs typeface="Calibri" panose="020F0502020204030204" pitchFamily="34" charset="0"/>
               </a:rPr>
-              <a:t>Chúa chết thay vì tội nhân và yêu thương con cái của </a:t>
-            </a:r>
-            <a:r>
-              <a:rPr lang="vi-VN" sz="3600" b="1" dirty="0" smtClean="0">
-                <a:solidFill>
-                  <a:srgbClr val="660033"/>
-                </a:solidFill>
-                <a:latin typeface="Calibri" panose="020F0502020204030204" pitchFamily="34" charset="0"/>
-                <a:ea typeface="微軟正黑體" pitchFamily="34" charset="-120"/>
-                <a:cs typeface="Calibri" panose="020F0502020204030204" pitchFamily="34" charset="0"/>
-              </a:rPr>
-              <a:t>Ngài</a:t>
+              <a:t>Chúa chết thay vì tội nhân và yêu thương con cái của Ngài</a:t>
             </a:r>
             <a:endParaRPr lang="en-US" sz="3600" b="1" dirty="0">
               <a:solidFill>
@@ -6307,7 +6143,7 @@
         <p:spPr>
           <a:xfrm>
             <a:off x="0" y="5253203"/>
-            <a:ext cx="12192000" cy="748988"/>
+            <a:ext cx="12192000" cy="584775"/>
           </a:xfrm>
           <a:prstGeom prst="rect">
             <a:avLst/>
@@ -6322,54 +6158,39 @@
           <a:p>
             <a:pPr algn="ctr"/>
             <a:r>
-              <a:rPr lang="en-US" sz="4267" b="1" dirty="0">
+              <a:rPr lang="en-US" sz="3200" b="1" dirty="0">
                 <a:solidFill>
                   <a:srgbClr val="000066"/>
                 </a:solidFill>
-                <a:effectLst/>
                 <a:latin typeface="Microsoft JhengHei" panose="020B0604030504040204" pitchFamily="34" charset="-120"/>
                 <a:ea typeface="Microsoft JhengHei" panose="020B0604030504040204" pitchFamily="34" charset="-120"/>
               </a:rPr>
               <a:t>( </a:t>
             </a:r>
             <a:r>
-              <a:rPr lang="zh-CN" altLang="en-US" sz="4267" b="1" dirty="0" smtClean="0">
+              <a:rPr lang="zh-CN" altLang="en-US" sz="3200" b="1" dirty="0">
                 <a:solidFill>
                   <a:srgbClr val="000066"/>
                 </a:solidFill>
-                <a:effectLst/>
                 <a:latin typeface="Microsoft JhengHei" panose="020B0604030504040204" pitchFamily="34" charset="-120"/>
                 <a:ea typeface="Microsoft JhengHei" panose="020B0604030504040204" pitchFamily="34" charset="-120"/>
               </a:rPr>
-              <a:t>前副</a:t>
-            </a:r>
-            <a:r>
-              <a:rPr lang="en-US" sz="4267" b="1" dirty="0" smtClean="0">
+              <a:t>前副歌</a:t>
+            </a:r>
+            <a:r>
+              <a:rPr lang="en-US" sz="3200" b="1" dirty="0">
                 <a:solidFill>
                   <a:srgbClr val="000066"/>
                 </a:solidFill>
-                <a:effectLst/>
                 <a:latin typeface="Microsoft JhengHei" panose="020B0604030504040204" pitchFamily="34" charset="-120"/>
                 <a:ea typeface="Microsoft JhengHei" panose="020B0604030504040204" pitchFamily="34" charset="-120"/>
               </a:rPr>
-              <a:t> </a:t>
-            </a:r>
-            <a:r>
-              <a:rPr lang="en-US" sz="4267" b="1" dirty="0">
-                <a:solidFill>
-                  <a:srgbClr val="000066"/>
-                </a:solidFill>
-                <a:effectLst/>
-                <a:latin typeface="Microsoft JhengHei" panose="020B0604030504040204" pitchFamily="34" charset="-120"/>
-                <a:ea typeface="Microsoft JhengHei" panose="020B0604030504040204" pitchFamily="34" charset="-120"/>
-              </a:rPr>
-              <a:t>)</a:t>
-            </a:r>
-            <a:endParaRPr lang="vi-VN" sz="4267" b="1" dirty="0">
+              <a:t> )</a:t>
+            </a:r>
+            <a:endParaRPr lang="vi-VN" sz="3200" b="1" dirty="0">
               <a:solidFill>
                 <a:srgbClr val="000066"/>
               </a:solidFill>
-              <a:effectLst/>
               <a:ea typeface="Microsoft JhengHei" panose="020B0604030504040204" pitchFamily="34" charset="-120"/>
             </a:endParaRPr>
           </a:p>
@@ -6636,7 +6457,7 @@
         <p:spPr>
           <a:xfrm>
             <a:off x="0" y="5253203"/>
-            <a:ext cx="12192000" cy="748988"/>
+            <a:ext cx="12192000" cy="584775"/>
           </a:xfrm>
           <a:prstGeom prst="rect">
             <a:avLst/>
@@ -6651,54 +6472,39 @@
           <a:p>
             <a:pPr algn="ctr"/>
             <a:r>
-              <a:rPr lang="en-US" sz="4267" b="1" dirty="0" smtClean="0">
+              <a:rPr lang="en-US" sz="3200" b="1" dirty="0">
                 <a:solidFill>
                   <a:srgbClr val="000066"/>
                 </a:solidFill>
-                <a:effectLst/>
                 <a:latin typeface="Microsoft JhengHei" panose="020B0604030504040204" pitchFamily="34" charset="-120"/>
                 <a:ea typeface="Microsoft JhengHei" panose="020B0604030504040204" pitchFamily="34" charset="-120"/>
               </a:rPr>
               <a:t>( </a:t>
             </a:r>
             <a:r>
-              <a:rPr lang="zh-CN" altLang="en-US" sz="4267" b="1" dirty="0" smtClean="0">
+              <a:rPr lang="zh-CN" altLang="en-US" sz="3200" b="1" dirty="0">
                 <a:solidFill>
                   <a:srgbClr val="000066"/>
                 </a:solidFill>
-                <a:effectLst/>
                 <a:latin typeface="Microsoft JhengHei" panose="020B0604030504040204" pitchFamily="34" charset="-120"/>
                 <a:ea typeface="Microsoft JhengHei" panose="020B0604030504040204" pitchFamily="34" charset="-120"/>
               </a:rPr>
-              <a:t>副</a:t>
-            </a:r>
-            <a:r>
-              <a:rPr lang="en-US" sz="4267" b="1" dirty="0" smtClean="0">
+              <a:t>副歌</a:t>
+            </a:r>
+            <a:r>
+              <a:rPr lang="en-US" sz="3200" b="1" dirty="0">
                 <a:solidFill>
                   <a:srgbClr val="000066"/>
                 </a:solidFill>
-                <a:effectLst/>
                 <a:latin typeface="Microsoft JhengHei" panose="020B0604030504040204" pitchFamily="34" charset="-120"/>
                 <a:ea typeface="Microsoft JhengHei" panose="020B0604030504040204" pitchFamily="34" charset="-120"/>
               </a:rPr>
-              <a:t> </a:t>
-            </a:r>
-            <a:r>
-              <a:rPr lang="en-US" sz="4267" b="1" dirty="0">
-                <a:solidFill>
-                  <a:srgbClr val="000066"/>
-                </a:solidFill>
-                <a:effectLst/>
-                <a:latin typeface="Microsoft JhengHei" panose="020B0604030504040204" pitchFamily="34" charset="-120"/>
-                <a:ea typeface="Microsoft JhengHei" panose="020B0604030504040204" pitchFamily="34" charset="-120"/>
-              </a:rPr>
-              <a:t>)</a:t>
-            </a:r>
-            <a:endParaRPr lang="vi-VN" sz="4267" b="1" dirty="0">
+              <a:t> )</a:t>
+            </a:r>
+            <a:endParaRPr lang="vi-VN" sz="3200" b="1" dirty="0">
               <a:solidFill>
                 <a:srgbClr val="000066"/>
               </a:solidFill>
-              <a:effectLst/>
               <a:ea typeface="Microsoft JhengHei" panose="020B0604030504040204" pitchFamily="34" charset="-120"/>
             </a:endParaRPr>
           </a:p>
@@ -6985,7 +6791,7 @@
         <p:spPr>
           <a:xfrm>
             <a:off x="0" y="5253203"/>
-            <a:ext cx="12192000" cy="748988"/>
+            <a:ext cx="12192000" cy="584775"/>
           </a:xfrm>
           <a:prstGeom prst="rect">
             <a:avLst/>
@@ -7000,54 +6806,39 @@
           <a:p>
             <a:pPr algn="ctr"/>
             <a:r>
-              <a:rPr lang="en-US" sz="4267" b="1" dirty="0" smtClean="0">
+              <a:rPr lang="en-US" sz="3200" b="1" dirty="0">
                 <a:solidFill>
                   <a:srgbClr val="000066"/>
                 </a:solidFill>
-                <a:effectLst/>
                 <a:latin typeface="Microsoft JhengHei" panose="020B0604030504040204" pitchFamily="34" charset="-120"/>
                 <a:ea typeface="Microsoft JhengHei" panose="020B0604030504040204" pitchFamily="34" charset="-120"/>
               </a:rPr>
               <a:t>( </a:t>
             </a:r>
             <a:r>
-              <a:rPr lang="zh-CN" altLang="en-US" sz="4267" b="1" dirty="0" smtClean="0">
+              <a:rPr lang="zh-CN" altLang="en-US" sz="3200" b="1" dirty="0">
                 <a:solidFill>
                   <a:srgbClr val="000066"/>
                 </a:solidFill>
-                <a:effectLst/>
                 <a:latin typeface="Microsoft JhengHei" panose="020B0604030504040204" pitchFamily="34" charset="-120"/>
                 <a:ea typeface="Microsoft JhengHei" panose="020B0604030504040204" pitchFamily="34" charset="-120"/>
               </a:rPr>
-              <a:t>副</a:t>
-            </a:r>
-            <a:r>
-              <a:rPr lang="en-US" sz="4267" b="1" dirty="0" smtClean="0">
+              <a:t>副歌</a:t>
+            </a:r>
+            <a:r>
+              <a:rPr lang="en-US" sz="3200" b="1" dirty="0">
                 <a:solidFill>
                   <a:srgbClr val="000066"/>
                 </a:solidFill>
-                <a:effectLst/>
                 <a:latin typeface="Microsoft JhengHei" panose="020B0604030504040204" pitchFamily="34" charset="-120"/>
                 <a:ea typeface="Microsoft JhengHei" panose="020B0604030504040204" pitchFamily="34" charset="-120"/>
               </a:rPr>
-              <a:t> </a:t>
-            </a:r>
-            <a:r>
-              <a:rPr lang="en-US" sz="4267" b="1" dirty="0">
-                <a:solidFill>
-                  <a:srgbClr val="000066"/>
-                </a:solidFill>
-                <a:effectLst/>
-                <a:latin typeface="Microsoft JhengHei" panose="020B0604030504040204" pitchFamily="34" charset="-120"/>
-                <a:ea typeface="Microsoft JhengHei" panose="020B0604030504040204" pitchFamily="34" charset="-120"/>
-              </a:rPr>
-              <a:t>)</a:t>
-            </a:r>
-            <a:endParaRPr lang="vi-VN" sz="4267" b="1" dirty="0">
+              <a:t> )</a:t>
+            </a:r>
+            <a:endParaRPr lang="vi-VN" sz="3200" b="1" dirty="0">
               <a:solidFill>
                 <a:srgbClr val="000066"/>
               </a:solidFill>
-              <a:effectLst/>
               <a:ea typeface="Microsoft JhengHei" panose="020B0604030504040204" pitchFamily="34" charset="-120"/>
             </a:endParaRPr>
           </a:p>
